--- a/GuilhermeBackLucasFritzke/Template_Semnario_Grupo_Guilherme_Lucas_V3.pptx
+++ b/GuilhermeBackLucasFritzke/Template_Semnario_Grupo_Guilherme_Lucas_V3.pptx
@@ -5,7 +5,7 @@
     <p:sldMasterId id="2147483648" r:id="rId1"/>
   </p:sldMasterIdLst>
   <p:notesMasterIdLst>
-    <p:notesMasterId r:id="rId15"/>
+    <p:notesMasterId r:id="rId17"/>
   </p:notesMasterIdLst>
   <p:sldIdLst>
     <p:sldId id="256" r:id="rId2"/>
@@ -17,10 +17,12 @@
     <p:sldId id="1698" r:id="rId8"/>
     <p:sldId id="696" r:id="rId9"/>
     <p:sldId id="1699" r:id="rId10"/>
-    <p:sldId id="259" r:id="rId11"/>
-    <p:sldId id="260" r:id="rId12"/>
-    <p:sldId id="261" r:id="rId13"/>
-    <p:sldId id="262" r:id="rId14"/>
+    <p:sldId id="1700" r:id="rId11"/>
+    <p:sldId id="1701" r:id="rId12"/>
+    <p:sldId id="259" r:id="rId13"/>
+    <p:sldId id="260" r:id="rId14"/>
+    <p:sldId id="261" r:id="rId15"/>
+    <p:sldId id="262" r:id="rId16"/>
   </p:sldIdLst>
   <p:sldSz cx="12192000" cy="6858000"/>
   <p:notesSz cx="6858000" cy="9144000"/>
@@ -217,7 +219,7 @@
           <a:p>
             <a:fld id="{3CC433CB-0624-41BF-866C-207C81F879F3}" type="datetimeFigureOut">
               <a:rPr lang="pt-BR" smtClean="0"/>
-              <a:t>07/05/2026</a:t>
+              <a:t>08/05/2026</a:t>
             </a:fld>
             <a:endParaRPr lang="pt-BR"/>
           </a:p>
@@ -1359,6 +1361,2469 @@
         <p:cNvPr id="1" name="">
           <a:extLst>
             <a:ext uri="{FF2B5EF4-FFF2-40B4-BE49-F238E27FC236}">
+              <a16:creationId xmlns:a16="http://schemas.microsoft.com/office/drawing/2014/main" id="{C476B335-C9B1-D1E8-12B3-F624D19DA407}"/>
+            </a:ext>
+          </a:extLst>
+        </p:cNvPr>
+        <p:cNvGrpSpPr/>
+        <p:nvPr/>
+      </p:nvGrpSpPr>
+      <p:grpSpPr>
+        <a:xfrm>
+          <a:off x="0" y="0"/>
+          <a:ext cx="0" cy="0"/>
+          <a:chOff x="0" y="0"/>
+          <a:chExt cx="0" cy="0"/>
+        </a:xfrm>
+      </p:grpSpPr>
+      <p:sp>
+        <p:nvSpPr>
+          <p:cNvPr id="3" name="TextBox 1">
+            <a:extLst>
+              <a:ext uri="{FF2B5EF4-FFF2-40B4-BE49-F238E27FC236}">
+                <a16:creationId xmlns:a16="http://schemas.microsoft.com/office/drawing/2014/main" id="{74832CA3-17A7-896C-9577-427EEFDD3672}"/>
+              </a:ext>
+            </a:extLst>
+          </p:cNvPr>
+          <p:cNvSpPr txBox="1"/>
+          <p:nvPr/>
+        </p:nvSpPr>
+        <p:spPr>
+          <a:xfrm>
+            <a:off x="322910" y="538000"/>
+            <a:ext cx="11200000" cy="523220"/>
+          </a:xfrm>
+          <a:prstGeom prst="rect">
+            <a:avLst/>
+          </a:prstGeom>
+          <a:noFill/>
+        </p:spPr>
+        <p:txBody>
+          <a:bodyPr wrap="square" lIns="0" rIns="0">
+            <a:spAutoFit/>
+          </a:bodyPr>
+          <a:lstStyle/>
+          <a:p>
+            <a:pPr algn="l"/>
+            <a:r>
+              <a:rPr sz="2800" b="1" i="0" dirty="0">
+                <a:solidFill>
+                  <a:srgbClr val="156082"/>
+                </a:solidFill>
+                <a:latin typeface="+mj-lt"/>
+              </a:rPr>
+              <a:t>3.1 Modelo Formal</a:t>
+            </a:r>
+          </a:p>
+        </p:txBody>
+      </p:sp>
+      <p:sp>
+        <p:nvSpPr>
+          <p:cNvPr id="5" name="TextBox 2">
+            <a:extLst>
+              <a:ext uri="{FF2B5EF4-FFF2-40B4-BE49-F238E27FC236}">
+                <a16:creationId xmlns:a16="http://schemas.microsoft.com/office/drawing/2014/main" id="{DEABDB75-D169-6791-5F82-FF48ECD6759F}"/>
+              </a:ext>
+            </a:extLst>
+          </p:cNvPr>
+          <p:cNvSpPr txBox="1"/>
+          <p:nvPr/>
+        </p:nvSpPr>
+        <p:spPr>
+          <a:xfrm>
+            <a:off x="322910" y="1218000"/>
+            <a:ext cx="11200000" cy="323165"/>
+          </a:xfrm>
+          <a:prstGeom prst="rect">
+            <a:avLst/>
+          </a:prstGeom>
+          <a:noFill/>
+        </p:spPr>
+        <p:txBody>
+          <a:bodyPr wrap="square" lIns="0" rIns="0">
+            <a:spAutoFit/>
+          </a:bodyPr>
+          <a:lstStyle/>
+          <a:p>
+            <a:pPr algn="l"/>
+            <a:r>
+              <a:rPr sz="1500" b="0" i="0" dirty="0">
+                <a:solidFill>
+                  <a:srgbClr val="1F1F1F"/>
+                </a:solidFill>
+                <a:latin typeface="+mj-lt"/>
+              </a:rPr>
+              <a:t>Seja o </a:t>
+            </a:r>
+            <a:r>
+              <a:rPr sz="1500" b="0" i="0" dirty="0" err="1">
+                <a:solidFill>
+                  <a:srgbClr val="1F1F1F"/>
+                </a:solidFill>
+                <a:latin typeface="+mj-lt"/>
+              </a:rPr>
+              <a:t>sistema</a:t>
+            </a:r>
+            <a:r>
+              <a:rPr sz="1500" b="0" i="0" dirty="0">
+                <a:solidFill>
+                  <a:srgbClr val="1F1F1F"/>
+                </a:solidFill>
+                <a:latin typeface="+mj-lt"/>
+              </a:rPr>
+              <a:t>:</a:t>
+            </a:r>
+          </a:p>
+        </p:txBody>
+      </p:sp>
+      <p:sp>
+        <p:nvSpPr>
+          <p:cNvPr id="7" name="TextBox 3">
+            <a:extLst>
+              <a:ext uri="{FF2B5EF4-FFF2-40B4-BE49-F238E27FC236}">
+                <a16:creationId xmlns:a16="http://schemas.microsoft.com/office/drawing/2014/main" id="{9A780BBB-3E30-C26D-75D0-3EE31C9147F2}"/>
+              </a:ext>
+            </a:extLst>
+          </p:cNvPr>
+          <p:cNvSpPr txBox="1"/>
+          <p:nvPr/>
+        </p:nvSpPr>
+        <p:spPr>
+          <a:xfrm>
+            <a:off x="4326264" y="1638000"/>
+            <a:ext cx="3200000" cy="520000"/>
+          </a:xfrm>
+          <a:prstGeom prst="rect">
+            <a:avLst/>
+          </a:prstGeom>
+          <a:noFill/>
+        </p:spPr>
+        <p:txBody>
+          <a:bodyPr wrap="square" lIns="0" rIns="0">
+            <a:spAutoFit/>
+          </a:bodyPr>
+          <a:lstStyle/>
+          <a:p>
+            <a:pPr algn="ctr"/>
+            <a:r>
+              <a:rPr sz="2200" b="1" i="0">
+                <a:solidFill>
+                  <a:srgbClr val="C0392B"/>
+                </a:solidFill>
+                <a:latin typeface="Cambria"/>
+              </a:rPr>
+              <a:t>S = ⟨ A, E, R, F, T, I, D, O ⟩</a:t>
+            </a:r>
+          </a:p>
+        </p:txBody>
+      </p:sp>
+      <p:graphicFrame>
+        <p:nvGraphicFramePr>
+          <p:cNvPr id="8" name="Table 4">
+            <a:extLst>
+              <a:ext uri="{FF2B5EF4-FFF2-40B4-BE49-F238E27FC236}">
+                <a16:creationId xmlns:a16="http://schemas.microsoft.com/office/drawing/2014/main" id="{F6B05FA0-8315-CDDC-4926-749B1906FBC6}"/>
+              </a:ext>
+            </a:extLst>
+          </p:cNvPr>
+          <p:cNvGraphicFramePr>
+            <a:graphicFrameLocks noGrp="1"/>
+          </p:cNvGraphicFramePr>
+          <p:nvPr>
+            <p:extLst>
+              <p:ext uri="{D42A27DB-BD31-4B8C-83A1-F6EECF244321}">
+                <p14:modId xmlns:p14="http://schemas.microsoft.com/office/powerpoint/2010/main" val="3636611755"/>
+              </p:ext>
+            </p:extLst>
+          </p:nvPr>
+        </p:nvGraphicFramePr>
+        <p:xfrm>
+          <a:off x="322910" y="2408000"/>
+          <a:ext cx="5400000" cy="4040000"/>
+        </p:xfrm>
+        <a:graphic>
+          <a:graphicData uri="http://schemas.openxmlformats.org/drawingml/2006/table">
+            <a:tbl>
+              <a:tblPr firstRow="1" bandRow="1">
+                <a:tableStyleId>{5C22544A-7EE6-4342-B048-85BDC9FD1C3A}</a:tableStyleId>
+              </a:tblPr>
+              <a:tblGrid>
+                <a:gridCol w="1300000">
+                  <a:extLst>
+                    <a:ext uri="{9D8B030D-6E8A-4147-A177-3AD203B41FA5}">
+                      <a16:colId xmlns:a16="http://schemas.microsoft.com/office/drawing/2014/main" val="20000"/>
+                    </a:ext>
+                  </a:extLst>
+                </a:gridCol>
+                <a:gridCol w="4100000">
+                  <a:extLst>
+                    <a:ext uri="{9D8B030D-6E8A-4147-A177-3AD203B41FA5}">
+                      <a16:colId xmlns:a16="http://schemas.microsoft.com/office/drawing/2014/main" val="20001"/>
+                    </a:ext>
+                  </a:extLst>
+                </a:gridCol>
+              </a:tblGrid>
+              <a:tr h="440000">
+                <a:tc>
+                  <a:txBody>
+                    <a:bodyPr/>
+                    <a:lstStyle/>
+                    <a:p>
+                      <a:pPr algn="ctr"/>
+                      <a:r>
+                        <a:rPr sz="1400" b="1">
+                          <a:solidFill>
+                            <a:srgbClr val="C0392B"/>
+                          </a:solidFill>
+                          <a:latin typeface="+mj-lt"/>
+                        </a:rPr>
+                        <a:t>Símbolo</a:t>
+                      </a:r>
+                    </a:p>
+                  </a:txBody>
+                  <a:tcPr anchor="ctr">
+                    <a:solidFill>
+                      <a:srgbClr val="EDF2F7"/>
+                    </a:solidFill>
+                  </a:tcPr>
+                </a:tc>
+                <a:tc>
+                  <a:txBody>
+                    <a:bodyPr/>
+                    <a:lstStyle/>
+                    <a:p>
+                      <a:pPr algn="ctr"/>
+                      <a:r>
+                        <a:rPr sz="1400" b="1" dirty="0" err="1">
+                          <a:solidFill>
+                            <a:srgbClr val="C0392B"/>
+                          </a:solidFill>
+                          <a:latin typeface="+mj-lt"/>
+                        </a:rPr>
+                        <a:t>Significado</a:t>
+                      </a:r>
+                      <a:endParaRPr sz="1400" b="1" dirty="0">
+                        <a:solidFill>
+                          <a:srgbClr val="C0392B"/>
+                        </a:solidFill>
+                        <a:latin typeface="+mj-lt"/>
+                      </a:endParaRPr>
+                    </a:p>
+                  </a:txBody>
+                  <a:tcPr anchor="ctr">
+                    <a:solidFill>
+                      <a:srgbClr val="EDF2F7"/>
+                    </a:solidFill>
+                  </a:tcPr>
+                </a:tc>
+                <a:extLst>
+                  <a:ext uri="{0D108BD9-81ED-4DB2-BD59-A6C34878D82A}">
+                    <a16:rowId xmlns:a16="http://schemas.microsoft.com/office/drawing/2014/main" val="10000"/>
+                  </a:ext>
+                </a:extLst>
+              </a:tr>
+              <a:tr h="450000">
+                <a:tc>
+                  <a:txBody>
+                    <a:bodyPr/>
+                    <a:lstStyle/>
+                    <a:p>
+                      <a:pPr algn="ctr"/>
+                      <a:r>
+                        <a:rPr sz="1400" b="1">
+                          <a:solidFill>
+                            <a:srgbClr val="0E2841"/>
+                          </a:solidFill>
+                          <a:latin typeface="Calibri"/>
+                        </a:rPr>
+                        <a:t>(A)</a:t>
+                      </a:r>
+                    </a:p>
+                  </a:txBody>
+                  <a:tcPr anchor="ctr">
+                    <a:solidFill>
+                      <a:srgbClr val="E8E8E8"/>
+                    </a:solidFill>
+                  </a:tcPr>
+                </a:tc>
+                <a:tc>
+                  <a:txBody>
+                    <a:bodyPr/>
+                    <a:lstStyle/>
+                    <a:p>
+                      <a:pPr algn="l"/>
+                      <a:r>
+                        <a:rPr sz="1200" b="0">
+                          <a:solidFill>
+                            <a:srgbClr val="1F1F1F"/>
+                          </a:solidFill>
+                          <a:latin typeface="+mj-lt"/>
+                        </a:rPr>
+                        <a:t>ocupantes ∪ brigadistas (heterogêneos)</a:t>
+                      </a:r>
+                    </a:p>
+                  </a:txBody>
+                  <a:tcPr anchor="ctr">
+                    <a:solidFill>
+                      <a:srgbClr val="E8E8E8"/>
+                    </a:solidFill>
+                  </a:tcPr>
+                </a:tc>
+                <a:extLst>
+                  <a:ext uri="{0D108BD9-81ED-4DB2-BD59-A6C34878D82A}">
+                    <a16:rowId xmlns:a16="http://schemas.microsoft.com/office/drawing/2014/main" val="10001"/>
+                  </a:ext>
+                </a:extLst>
+              </a:tr>
+              <a:tr h="450000">
+                <a:tc>
+                  <a:txBody>
+                    <a:bodyPr/>
+                    <a:lstStyle/>
+                    <a:p>
+                      <a:pPr algn="ctr"/>
+                      <a:r>
+                        <a:rPr sz="1400" b="1">
+                          <a:solidFill>
+                            <a:srgbClr val="0E2841"/>
+                          </a:solidFill>
+                          <a:latin typeface="Calibri"/>
+                        </a:rPr>
+                        <a:t>(E)</a:t>
+                      </a:r>
+                    </a:p>
+                  </a:txBody>
+                  <a:tcPr anchor="ctr">
+                    <a:solidFill>
+                      <a:srgbClr val="EDF2F7"/>
+                    </a:solidFill>
+                  </a:tcPr>
+                </a:tc>
+                <a:tc>
+                  <a:txBody>
+                    <a:bodyPr/>
+                    <a:lstStyle/>
+                    <a:p>
+                      <a:pPr algn="l"/>
+                      <a:r>
+                        <a:rPr sz="1200" b="0" dirty="0">
+                          <a:solidFill>
+                            <a:srgbClr val="1F1F1F"/>
+                          </a:solidFill>
+                          <a:latin typeface="+mj-lt"/>
+                        </a:rPr>
+                        <a:t>edifício: 30 andares × grade 20×20 (2D por andar)</a:t>
+                      </a:r>
+                    </a:p>
+                  </a:txBody>
+                  <a:tcPr anchor="ctr">
+                    <a:solidFill>
+                      <a:srgbClr val="EDF2F7"/>
+                    </a:solidFill>
+                  </a:tcPr>
+                </a:tc>
+                <a:extLst>
+                  <a:ext uri="{0D108BD9-81ED-4DB2-BD59-A6C34878D82A}">
+                    <a16:rowId xmlns:a16="http://schemas.microsoft.com/office/drawing/2014/main" val="10002"/>
+                  </a:ext>
+                </a:extLst>
+              </a:tr>
+              <a:tr h="450000">
+                <a:tc>
+                  <a:txBody>
+                    <a:bodyPr/>
+                    <a:lstStyle/>
+                    <a:p>
+                      <a:pPr algn="ctr"/>
+                      <a:r>
+                        <a:rPr sz="1400" b="1" dirty="0">
+                          <a:solidFill>
+                            <a:srgbClr val="0E2841"/>
+                          </a:solidFill>
+                          <a:latin typeface="Calibri"/>
+                        </a:rPr>
+                        <a:t>(R)</a:t>
+                      </a:r>
+                    </a:p>
+                  </a:txBody>
+                  <a:tcPr anchor="ctr">
+                    <a:solidFill>
+                      <a:srgbClr val="E8E8E8"/>
+                    </a:solidFill>
+                  </a:tcPr>
+                </a:tc>
+                <a:tc>
+                  <a:txBody>
+                    <a:bodyPr/>
+                    <a:lstStyle/>
+                    <a:p>
+                      <a:pPr algn="l"/>
+                      <a:r>
+                        <a:rPr sz="1200" b="0" dirty="0">
+                          <a:solidFill>
+                            <a:srgbClr val="1F1F1F"/>
+                          </a:solidFill>
+                          <a:latin typeface="+mj-lt"/>
+                        </a:rPr>
+                        <a:t>conjunto de </a:t>
+                      </a:r>
+                      <a:r>
+                        <a:rPr sz="1200" b="0" dirty="0" err="1">
+                          <a:solidFill>
+                            <a:srgbClr val="1F1F1F"/>
+                          </a:solidFill>
+                          <a:latin typeface="+mj-lt"/>
+                        </a:rPr>
+                        <a:t>rotas</a:t>
+                      </a:r>
+                      <a:r>
+                        <a:rPr sz="1200" b="0" dirty="0">
+                          <a:solidFill>
+                            <a:srgbClr val="1F1F1F"/>
+                          </a:solidFill>
+                          <a:latin typeface="+mj-lt"/>
+                        </a:rPr>
+                        <a:t> </a:t>
+                      </a:r>
+                      <a:r>
+                        <a:rPr sz="1200" b="0" dirty="0" err="1">
+                          <a:solidFill>
+                            <a:srgbClr val="1F1F1F"/>
+                          </a:solidFill>
+                          <a:latin typeface="+mj-lt"/>
+                        </a:rPr>
+                        <a:t>possíveis</a:t>
+                      </a:r>
+                      <a:endParaRPr sz="1200" b="0" dirty="0">
+                        <a:solidFill>
+                          <a:srgbClr val="1F1F1F"/>
+                        </a:solidFill>
+                        <a:latin typeface="+mj-lt"/>
+                      </a:endParaRPr>
+                    </a:p>
+                  </a:txBody>
+                  <a:tcPr anchor="ctr">
+                    <a:solidFill>
+                      <a:srgbClr val="E8E8E8"/>
+                    </a:solidFill>
+                  </a:tcPr>
+                </a:tc>
+                <a:extLst>
+                  <a:ext uri="{0D108BD9-81ED-4DB2-BD59-A6C34878D82A}">
+                    <a16:rowId xmlns:a16="http://schemas.microsoft.com/office/drawing/2014/main" val="10003"/>
+                  </a:ext>
+                </a:extLst>
+              </a:tr>
+              <a:tr h="450000">
+                <a:tc>
+                  <a:txBody>
+                    <a:bodyPr/>
+                    <a:lstStyle/>
+                    <a:p>
+                      <a:pPr algn="ctr"/>
+                      <a:r>
+                        <a:rPr sz="1400" b="1" dirty="0">
+                          <a:solidFill>
+                            <a:srgbClr val="0E2841"/>
+                          </a:solidFill>
+                          <a:latin typeface="Calibri"/>
+                        </a:rPr>
+                        <a:t>(F)</a:t>
+                      </a:r>
+                    </a:p>
+                  </a:txBody>
+                  <a:tcPr anchor="ctr">
+                    <a:solidFill>
+                      <a:srgbClr val="EDF2F7"/>
+                    </a:solidFill>
+                  </a:tcPr>
+                </a:tc>
+                <a:tc>
+                  <a:txBody>
+                    <a:bodyPr/>
+                    <a:lstStyle/>
+                    <a:p>
+                      <a:pPr algn="l"/>
+                      <a:r>
+                        <a:rPr sz="1200" b="0">
+                          <a:solidFill>
+                            <a:srgbClr val="1F1F1F"/>
+                          </a:solidFill>
+                          <a:latin typeface="+mj-lt"/>
+                        </a:rPr>
+                        <a:t>dinâmica do fogo e da fumaça</a:t>
+                      </a:r>
+                    </a:p>
+                  </a:txBody>
+                  <a:tcPr anchor="ctr">
+                    <a:solidFill>
+                      <a:srgbClr val="EDF2F7"/>
+                    </a:solidFill>
+                  </a:tcPr>
+                </a:tc>
+                <a:extLst>
+                  <a:ext uri="{0D108BD9-81ED-4DB2-BD59-A6C34878D82A}">
+                    <a16:rowId xmlns:a16="http://schemas.microsoft.com/office/drawing/2014/main" val="10004"/>
+                  </a:ext>
+                </a:extLst>
+              </a:tr>
+              <a:tr h="450000">
+                <a:tc>
+                  <a:txBody>
+                    <a:bodyPr/>
+                    <a:lstStyle/>
+                    <a:p>
+                      <a:pPr algn="ctr"/>
+                      <a:r>
+                        <a:rPr sz="1400" b="1">
+                          <a:solidFill>
+                            <a:srgbClr val="0E2841"/>
+                          </a:solidFill>
+                          <a:latin typeface="Calibri"/>
+                        </a:rPr>
+                        <a:t>(T)</a:t>
+                      </a:r>
+                    </a:p>
+                  </a:txBody>
+                  <a:tcPr anchor="ctr">
+                    <a:solidFill>
+                      <a:srgbClr val="E8E8E8"/>
+                    </a:solidFill>
+                  </a:tcPr>
+                </a:tc>
+                <a:tc>
+                  <a:txBody>
+                    <a:bodyPr/>
+                    <a:lstStyle/>
+                    <a:p>
+                      <a:pPr algn="l"/>
+                      <a:r>
+                        <a:rPr sz="1200" b="0">
+                          <a:solidFill>
+                            <a:srgbClr val="1F1F1F"/>
+                          </a:solidFill>
+                          <a:latin typeface="+mj-lt"/>
+                        </a:rPr>
+                        <a:t>tempo discreto: t ∈ {0, 1, ..., T_max} (tick)</a:t>
+                      </a:r>
+                    </a:p>
+                  </a:txBody>
+                  <a:tcPr anchor="ctr">
+                    <a:solidFill>
+                      <a:srgbClr val="E8E8E8"/>
+                    </a:solidFill>
+                  </a:tcPr>
+                </a:tc>
+                <a:extLst>
+                  <a:ext uri="{0D108BD9-81ED-4DB2-BD59-A6C34878D82A}">
+                    <a16:rowId xmlns:a16="http://schemas.microsoft.com/office/drawing/2014/main" val="10005"/>
+                  </a:ext>
+                </a:extLst>
+              </a:tr>
+              <a:tr h="450000">
+                <a:tc>
+                  <a:txBody>
+                    <a:bodyPr/>
+                    <a:lstStyle/>
+                    <a:p>
+                      <a:pPr algn="ctr"/>
+                      <a:r>
+                        <a:rPr sz="1400" b="1" dirty="0">
+                          <a:solidFill>
+                            <a:srgbClr val="0E2841"/>
+                          </a:solidFill>
+                          <a:latin typeface="Calibri"/>
+                        </a:rPr>
+                        <a:t>(I)</a:t>
+                      </a:r>
+                    </a:p>
+                  </a:txBody>
+                  <a:tcPr anchor="ctr">
+                    <a:solidFill>
+                      <a:srgbClr val="EDF2F7"/>
+                    </a:solidFill>
+                  </a:tcPr>
+                </a:tc>
+                <a:tc>
+                  <a:txBody>
+                    <a:bodyPr/>
+                    <a:lstStyle/>
+                    <a:p>
+                      <a:pPr algn="l"/>
+                      <a:r>
+                        <a:rPr sz="1200" b="0">
+                          <a:solidFill>
+                            <a:srgbClr val="1F1F1F"/>
+                          </a:solidFill>
+                          <a:latin typeface="+mj-lt"/>
+                        </a:rPr>
+                        <a:t>informação disponível aos agentes</a:t>
+                      </a:r>
+                    </a:p>
+                  </a:txBody>
+                  <a:tcPr anchor="ctr">
+                    <a:solidFill>
+                      <a:srgbClr val="EDF2F7"/>
+                    </a:solidFill>
+                  </a:tcPr>
+                </a:tc>
+                <a:extLst>
+                  <a:ext uri="{0D108BD9-81ED-4DB2-BD59-A6C34878D82A}">
+                    <a16:rowId xmlns:a16="http://schemas.microsoft.com/office/drawing/2014/main" val="10006"/>
+                  </a:ext>
+                </a:extLst>
+              </a:tr>
+              <a:tr h="450000">
+                <a:tc>
+                  <a:txBody>
+                    <a:bodyPr/>
+                    <a:lstStyle/>
+                    <a:p>
+                      <a:pPr algn="ctr"/>
+                      <a:r>
+                        <a:rPr sz="1400" b="1" dirty="0">
+                          <a:solidFill>
+                            <a:srgbClr val="0E2841"/>
+                          </a:solidFill>
+                          <a:latin typeface="Calibri"/>
+                        </a:rPr>
+                        <a:t>(D)</a:t>
+                      </a:r>
+                    </a:p>
+                  </a:txBody>
+                  <a:tcPr anchor="ctr">
+                    <a:solidFill>
+                      <a:srgbClr val="E8E8E8"/>
+                    </a:solidFill>
+                  </a:tcPr>
+                </a:tc>
+                <a:tc>
+                  <a:txBody>
+                    <a:bodyPr/>
+                    <a:lstStyle/>
+                    <a:p>
+                      <a:pPr algn="l"/>
+                      <a:r>
+                        <a:rPr sz="1200" b="0">
+                          <a:solidFill>
+                            <a:srgbClr val="1F1F1F"/>
+                          </a:solidFill>
+                          <a:latin typeface="+mj-lt"/>
+                        </a:rPr>
+                        <a:t>regras de decisão dos agentes</a:t>
+                      </a:r>
+                    </a:p>
+                  </a:txBody>
+                  <a:tcPr anchor="ctr">
+                    <a:solidFill>
+                      <a:srgbClr val="E8E8E8"/>
+                    </a:solidFill>
+                  </a:tcPr>
+                </a:tc>
+                <a:extLst>
+                  <a:ext uri="{0D108BD9-81ED-4DB2-BD59-A6C34878D82A}">
+                    <a16:rowId xmlns:a16="http://schemas.microsoft.com/office/drawing/2014/main" val="10007"/>
+                  </a:ext>
+                </a:extLst>
+              </a:tr>
+              <a:tr h="450000">
+                <a:tc>
+                  <a:txBody>
+                    <a:bodyPr/>
+                    <a:lstStyle/>
+                    <a:p>
+                      <a:pPr algn="ctr"/>
+                      <a:r>
+                        <a:rPr sz="1400" b="1" dirty="0">
+                          <a:solidFill>
+                            <a:srgbClr val="0E2841"/>
+                          </a:solidFill>
+                          <a:latin typeface="Calibri"/>
+                        </a:rPr>
+                        <a:t>(O)</a:t>
+                      </a:r>
+                    </a:p>
+                  </a:txBody>
+                  <a:tcPr anchor="ctr">
+                    <a:solidFill>
+                      <a:srgbClr val="EDF2F7"/>
+                    </a:solidFill>
+                  </a:tcPr>
+                </a:tc>
+                <a:tc>
+                  <a:txBody>
+                    <a:bodyPr/>
+                    <a:lstStyle/>
+                    <a:p>
+                      <a:pPr algn="l"/>
+                      <a:r>
+                        <a:rPr sz="1200" b="0" dirty="0">
+                          <a:solidFill>
+                            <a:srgbClr val="1F1F1F"/>
+                          </a:solidFill>
+                          <a:latin typeface="+mj-lt"/>
+                        </a:rPr>
+                        <a:t>T_evac, vítimas, mapa de calor, gargalos</a:t>
+                      </a:r>
+                    </a:p>
+                  </a:txBody>
+                  <a:tcPr anchor="ctr">
+                    <a:solidFill>
+                      <a:srgbClr val="EDF2F7"/>
+                    </a:solidFill>
+                  </a:tcPr>
+                </a:tc>
+                <a:extLst>
+                  <a:ext uri="{0D108BD9-81ED-4DB2-BD59-A6C34878D82A}">
+                    <a16:rowId xmlns:a16="http://schemas.microsoft.com/office/drawing/2014/main" val="10008"/>
+                  </a:ext>
+                </a:extLst>
+              </a:tr>
+            </a:tbl>
+          </a:graphicData>
+        </a:graphic>
+      </p:graphicFrame>
+      <p:sp>
+        <p:nvSpPr>
+          <p:cNvPr id="9" name="TextBox 5">
+            <a:extLst>
+              <a:ext uri="{FF2B5EF4-FFF2-40B4-BE49-F238E27FC236}">
+                <a16:creationId xmlns:a16="http://schemas.microsoft.com/office/drawing/2014/main" id="{49DD0001-B95B-6068-8160-E29F47E1DDA1}"/>
+              </a:ext>
+            </a:extLst>
+          </p:cNvPr>
+          <p:cNvSpPr txBox="1"/>
+          <p:nvPr/>
+        </p:nvSpPr>
+        <p:spPr>
+          <a:xfrm>
+            <a:off x="6126264" y="2408000"/>
+            <a:ext cx="5400000" cy="323165"/>
+          </a:xfrm>
+          <a:prstGeom prst="rect">
+            <a:avLst/>
+          </a:prstGeom>
+          <a:noFill/>
+        </p:spPr>
+        <p:txBody>
+          <a:bodyPr wrap="square" lIns="0" rIns="0">
+            <a:spAutoFit/>
+          </a:bodyPr>
+          <a:lstStyle/>
+          <a:p>
+            <a:pPr algn="l"/>
+            <a:r>
+              <a:rPr sz="1500" b="0" i="0" dirty="0" err="1">
+                <a:solidFill>
+                  <a:srgbClr val="1F1F1F"/>
+                </a:solidFill>
+                <a:latin typeface="+mj-lt"/>
+              </a:rPr>
+              <a:t>Regras</a:t>
+            </a:r>
+            <a:r>
+              <a:rPr sz="1500" b="0" i="0" dirty="0">
+                <a:solidFill>
+                  <a:srgbClr val="1F1F1F"/>
+                </a:solidFill>
+                <a:latin typeface="+mj-lt"/>
+              </a:rPr>
+              <a:t> </a:t>
+            </a:r>
+            <a:r>
+              <a:rPr sz="1500" b="0" i="0" dirty="0" err="1">
+                <a:solidFill>
+                  <a:srgbClr val="1F1F1F"/>
+                </a:solidFill>
+                <a:latin typeface="+mj-lt"/>
+              </a:rPr>
+              <a:t>formais</a:t>
+            </a:r>
+            <a:r>
+              <a:rPr sz="1500" b="0" i="0" dirty="0">
+                <a:solidFill>
+                  <a:srgbClr val="1F1F1F"/>
+                </a:solidFill>
+                <a:latin typeface="+mj-lt"/>
+              </a:rPr>
+              <a:t> </a:t>
+            </a:r>
+            <a:r>
+              <a:rPr sz="1500" b="0" i="0" dirty="0" err="1">
+                <a:solidFill>
+                  <a:srgbClr val="1F1F1F"/>
+                </a:solidFill>
+                <a:latin typeface="+mj-lt"/>
+              </a:rPr>
+              <a:t>básicas</a:t>
+            </a:r>
+            <a:r>
+              <a:rPr sz="1500" b="0" i="0" dirty="0">
+                <a:solidFill>
+                  <a:srgbClr val="1F1F1F"/>
+                </a:solidFill>
+                <a:latin typeface="+mj-lt"/>
+              </a:rPr>
+              <a:t>:</a:t>
+            </a:r>
+          </a:p>
+        </p:txBody>
+      </p:sp>
+      <p:sp>
+        <p:nvSpPr>
+          <p:cNvPr id="10" name="TextBox 6">
+            <a:extLst>
+              <a:ext uri="{FF2B5EF4-FFF2-40B4-BE49-F238E27FC236}">
+                <a16:creationId xmlns:a16="http://schemas.microsoft.com/office/drawing/2014/main" id="{BD9D4DA1-DEED-2210-E089-F0DC840769EE}"/>
+              </a:ext>
+            </a:extLst>
+          </p:cNvPr>
+          <p:cNvSpPr txBox="1"/>
+          <p:nvPr/>
+        </p:nvSpPr>
+        <p:spPr>
+          <a:xfrm>
+            <a:off x="6126264" y="2858000"/>
+            <a:ext cx="5400000" cy="2841804"/>
+          </a:xfrm>
+          <a:prstGeom prst="rect">
+            <a:avLst/>
+          </a:prstGeom>
+          <a:noFill/>
+        </p:spPr>
+        <p:txBody>
+          <a:bodyPr wrap="square" lIns="0" rIns="0">
+            <a:spAutoFit/>
+          </a:bodyPr>
+          <a:lstStyle/>
+          <a:p>
+            <a:pPr algn="l">
+              <a:spcBef>
+                <a:spcPts val="800"/>
+              </a:spcBef>
+            </a:pPr>
+            <a:r>
+              <a:rPr sz="1200" b="0" i="0" dirty="0">
+                <a:solidFill>
+                  <a:srgbClr val="1F1F1F"/>
+                </a:solidFill>
+                <a:latin typeface="+mj-lt"/>
+              </a:rPr>
+              <a:t>1. Todo </a:t>
+            </a:r>
+            <a:r>
+              <a:rPr sz="1200" b="0" i="0" dirty="0" err="1">
+                <a:solidFill>
+                  <a:srgbClr val="1F1F1F"/>
+                </a:solidFill>
+                <a:latin typeface="+mj-lt"/>
+              </a:rPr>
+              <a:t>agente</a:t>
+            </a:r>
+            <a:r>
+              <a:rPr sz="1200" b="0" i="0" dirty="0">
+                <a:solidFill>
+                  <a:srgbClr val="1F1F1F"/>
+                </a:solidFill>
+                <a:latin typeface="+mj-lt"/>
+              </a:rPr>
+              <a:t> </a:t>
+            </a:r>
+            <a:r>
+              <a:rPr sz="1200" b="0" i="0" dirty="0" err="1">
+                <a:solidFill>
+                  <a:srgbClr val="1F1F1F"/>
+                </a:solidFill>
+                <a:latin typeface="+mj-lt"/>
+              </a:rPr>
+              <a:t>possui</a:t>
+            </a:r>
+            <a:r>
+              <a:rPr sz="1200" b="0" i="0" dirty="0">
+                <a:solidFill>
+                  <a:srgbClr val="1F1F1F"/>
+                </a:solidFill>
+                <a:latin typeface="+mj-lt"/>
+              </a:rPr>
+              <a:t> </a:t>
+            </a:r>
+            <a:r>
+              <a:rPr sz="1200" b="0" i="0" dirty="0" err="1">
+                <a:solidFill>
+                  <a:srgbClr val="1F1F1F"/>
+                </a:solidFill>
+                <a:latin typeface="+mj-lt"/>
+              </a:rPr>
+              <a:t>posição</a:t>
+            </a:r>
+            <a:r>
+              <a:rPr sz="1200" b="0" i="0" dirty="0">
+                <a:solidFill>
+                  <a:srgbClr val="1F1F1F"/>
+                </a:solidFill>
+                <a:latin typeface="+mj-lt"/>
+              </a:rPr>
+              <a:t>:</a:t>
+            </a:r>
+          </a:p>
+          <a:p>
+            <a:pPr algn="l">
+              <a:spcBef>
+                <a:spcPts val="200"/>
+              </a:spcBef>
+            </a:pPr>
+            <a:r>
+              <a:rPr sz="1300" b="0" i="1" dirty="0">
+                <a:solidFill>
+                  <a:srgbClr val="1F1F1F"/>
+                </a:solidFill>
+                <a:latin typeface="Cambria"/>
+              </a:rPr>
+              <a:t>         xᵢ(t) ∈ E</a:t>
+            </a:r>
+          </a:p>
+          <a:p>
+            <a:pPr algn="l">
+              <a:spcBef>
+                <a:spcPts val="1000"/>
+              </a:spcBef>
+            </a:pPr>
+            <a:r>
+              <a:rPr sz="1200" b="0" i="0" dirty="0">
+                <a:solidFill>
+                  <a:srgbClr val="1F1F1F"/>
+                </a:solidFill>
+                <a:latin typeface="+mj-lt"/>
+              </a:rPr>
+              <a:t>2. Todo </a:t>
+            </a:r>
+            <a:r>
+              <a:rPr sz="1200" b="0" i="0" dirty="0" err="1">
+                <a:solidFill>
+                  <a:srgbClr val="1F1F1F"/>
+                </a:solidFill>
+                <a:latin typeface="+mj-lt"/>
+              </a:rPr>
+              <a:t>agente</a:t>
+            </a:r>
+            <a:r>
+              <a:rPr sz="1200" b="0" i="0" dirty="0">
+                <a:solidFill>
+                  <a:srgbClr val="1F1F1F"/>
+                </a:solidFill>
+                <a:latin typeface="+mj-lt"/>
+              </a:rPr>
+              <a:t> </a:t>
+            </a:r>
+            <a:r>
+              <a:rPr sz="1200" b="0" i="0" dirty="0" err="1">
+                <a:solidFill>
+                  <a:srgbClr val="1F1F1F"/>
+                </a:solidFill>
+                <a:latin typeface="+mj-lt"/>
+              </a:rPr>
+              <a:t>escolhe</a:t>
+            </a:r>
+            <a:r>
+              <a:rPr sz="1200" b="0" i="0" dirty="0">
+                <a:solidFill>
+                  <a:srgbClr val="1F1F1F"/>
+                </a:solidFill>
+                <a:latin typeface="+mj-lt"/>
+              </a:rPr>
+              <a:t> </a:t>
+            </a:r>
+            <a:r>
+              <a:rPr sz="1200" b="0" i="0" dirty="0" err="1">
+                <a:solidFill>
+                  <a:srgbClr val="1F1F1F"/>
+                </a:solidFill>
+                <a:latin typeface="+mj-lt"/>
+              </a:rPr>
+              <a:t>uma</a:t>
+            </a:r>
+            <a:r>
+              <a:rPr sz="1200" b="0" i="0" dirty="0">
+                <a:solidFill>
+                  <a:srgbClr val="1F1F1F"/>
+                </a:solidFill>
+                <a:latin typeface="+mj-lt"/>
+              </a:rPr>
+              <a:t> </a:t>
+            </a:r>
+            <a:r>
+              <a:rPr sz="1200" b="0" i="0" dirty="0" err="1">
+                <a:solidFill>
+                  <a:srgbClr val="1F1F1F"/>
+                </a:solidFill>
+                <a:latin typeface="+mj-lt"/>
+              </a:rPr>
+              <a:t>rota</a:t>
+            </a:r>
+            <a:r>
+              <a:rPr sz="1200" b="0" i="0" dirty="0">
+                <a:solidFill>
+                  <a:srgbClr val="1F1F1F"/>
+                </a:solidFill>
+                <a:latin typeface="+mj-lt"/>
+              </a:rPr>
+              <a:t>:</a:t>
+            </a:r>
+          </a:p>
+          <a:p>
+            <a:pPr algn="l">
+              <a:spcBef>
+                <a:spcPts val="200"/>
+              </a:spcBef>
+            </a:pPr>
+            <a:r>
+              <a:rPr sz="1300" b="0" i="1" dirty="0">
+                <a:solidFill>
+                  <a:srgbClr val="1F1F1F"/>
+                </a:solidFill>
+                <a:latin typeface="Cambria"/>
+              </a:rPr>
+              <a:t>         rᵢ(t) ∈ R</a:t>
+            </a:r>
+          </a:p>
+          <a:p>
+            <a:pPr algn="l">
+              <a:spcBef>
+                <a:spcPts val="1000"/>
+              </a:spcBef>
+            </a:pPr>
+            <a:r>
+              <a:rPr sz="1200" b="0" i="0" dirty="0">
+                <a:solidFill>
+                  <a:srgbClr val="1F1F1F"/>
+                </a:solidFill>
+                <a:latin typeface="+mj-lt"/>
+              </a:rPr>
+              <a:t>3. A </a:t>
+            </a:r>
+            <a:r>
+              <a:rPr sz="1200" b="0" i="0" dirty="0" err="1">
+                <a:solidFill>
+                  <a:srgbClr val="1F1F1F"/>
+                </a:solidFill>
+                <a:latin typeface="+mj-lt"/>
+              </a:rPr>
+              <a:t>escolha</a:t>
+            </a:r>
+            <a:r>
+              <a:rPr sz="1200" b="0" i="0" dirty="0">
+                <a:solidFill>
+                  <a:srgbClr val="1F1F1F"/>
+                </a:solidFill>
+                <a:latin typeface="+mj-lt"/>
+              </a:rPr>
+              <a:t> da </a:t>
+            </a:r>
+            <a:r>
+              <a:rPr sz="1200" b="0" i="0" dirty="0" err="1">
+                <a:solidFill>
+                  <a:srgbClr val="1F1F1F"/>
+                </a:solidFill>
+                <a:latin typeface="+mj-lt"/>
+              </a:rPr>
+              <a:t>rota</a:t>
+            </a:r>
+            <a:r>
+              <a:rPr sz="1200" b="0" i="0" dirty="0">
+                <a:solidFill>
+                  <a:srgbClr val="1F1F1F"/>
+                </a:solidFill>
+                <a:latin typeface="+mj-lt"/>
+              </a:rPr>
+              <a:t> </a:t>
+            </a:r>
+            <a:r>
+              <a:rPr sz="1200" b="0" i="0" dirty="0" err="1">
+                <a:solidFill>
+                  <a:srgbClr val="1F1F1F"/>
+                </a:solidFill>
+                <a:latin typeface="+mj-lt"/>
+              </a:rPr>
+              <a:t>depende</a:t>
+            </a:r>
+            <a:r>
+              <a:rPr sz="1200" b="0" i="0" dirty="0">
+                <a:solidFill>
+                  <a:srgbClr val="1F1F1F"/>
+                </a:solidFill>
+                <a:latin typeface="+mj-lt"/>
+              </a:rPr>
+              <a:t> de </a:t>
+            </a:r>
+            <a:r>
+              <a:rPr sz="1200" b="0" i="0" dirty="0" err="1">
+                <a:solidFill>
+                  <a:srgbClr val="1F1F1F"/>
+                </a:solidFill>
+                <a:latin typeface="+mj-lt"/>
+              </a:rPr>
+              <a:t>visibilidade</a:t>
+            </a:r>
+            <a:r>
+              <a:rPr sz="1200" b="0" i="0" dirty="0">
+                <a:solidFill>
+                  <a:srgbClr val="1F1F1F"/>
+                </a:solidFill>
+                <a:latin typeface="+mj-lt"/>
+              </a:rPr>
+              <a:t>,</a:t>
+            </a:r>
+          </a:p>
+          <a:p>
+            <a:pPr algn="l">
+              <a:spcBef>
+                <a:spcPts val="0"/>
+              </a:spcBef>
+            </a:pPr>
+            <a:r>
+              <a:rPr sz="1200" b="0" i="0" dirty="0">
+                <a:solidFill>
+                  <a:srgbClr val="1F1F1F"/>
+                </a:solidFill>
+                <a:latin typeface="+mj-lt"/>
+              </a:rPr>
+              <a:t>     </a:t>
+            </a:r>
+            <a:r>
+              <a:rPr sz="1200" b="0" i="0" dirty="0" err="1">
+                <a:solidFill>
+                  <a:srgbClr val="1F1F1F"/>
+                </a:solidFill>
+                <a:latin typeface="+mj-lt"/>
+              </a:rPr>
+              <a:t>distância</a:t>
+            </a:r>
+            <a:r>
+              <a:rPr sz="1200" b="0" i="0" dirty="0">
+                <a:solidFill>
+                  <a:srgbClr val="1F1F1F"/>
+                </a:solidFill>
+                <a:latin typeface="+mj-lt"/>
+              </a:rPr>
+              <a:t>, </a:t>
+            </a:r>
+            <a:r>
+              <a:rPr sz="1200" b="0" i="0" dirty="0" err="1">
+                <a:solidFill>
+                  <a:srgbClr val="1F1F1F"/>
+                </a:solidFill>
+                <a:latin typeface="+mj-lt"/>
+              </a:rPr>
+              <a:t>congestionamento</a:t>
+            </a:r>
+            <a:r>
+              <a:rPr sz="1200" b="0" i="0" dirty="0">
+                <a:solidFill>
+                  <a:srgbClr val="1F1F1F"/>
+                </a:solidFill>
+                <a:latin typeface="+mj-lt"/>
+              </a:rPr>
+              <a:t> e </a:t>
+            </a:r>
+            <a:r>
+              <a:rPr sz="1200" b="0" i="0" dirty="0" err="1">
+                <a:solidFill>
+                  <a:srgbClr val="1F1F1F"/>
+                </a:solidFill>
+                <a:latin typeface="+mj-lt"/>
+              </a:rPr>
+              <a:t>risco</a:t>
+            </a:r>
+            <a:r>
+              <a:rPr sz="1200" b="0" i="0" dirty="0">
+                <a:solidFill>
+                  <a:srgbClr val="1F1F1F"/>
+                </a:solidFill>
+                <a:latin typeface="+mj-lt"/>
+              </a:rPr>
+              <a:t>:</a:t>
+            </a:r>
+          </a:p>
+          <a:p>
+            <a:pPr algn="l">
+              <a:spcBef>
+                <a:spcPts val="200"/>
+              </a:spcBef>
+            </a:pPr>
+            <a:r>
+              <a:rPr sz="1300" b="0" i="1" dirty="0">
+                <a:solidFill>
+                  <a:srgbClr val="1F1F1F"/>
+                </a:solidFill>
+                <a:latin typeface="Cambria"/>
+              </a:rPr>
+              <a:t>         rᵢ(t) = Dᵢ(VIS, DIST, CONG, RISCO, INFO)</a:t>
+            </a:r>
+          </a:p>
+          <a:p>
+            <a:pPr algn="l">
+              <a:spcBef>
+                <a:spcPts val="1000"/>
+              </a:spcBef>
+            </a:pPr>
+            <a:r>
+              <a:rPr sz="1200" b="0" i="0" dirty="0">
+                <a:solidFill>
+                  <a:srgbClr val="1F1F1F"/>
+                </a:solidFill>
+                <a:latin typeface="+mj-lt"/>
+              </a:rPr>
+              <a:t>4. A </a:t>
+            </a:r>
+            <a:r>
+              <a:rPr sz="1200" b="0" i="0" dirty="0" err="1">
+                <a:solidFill>
+                  <a:srgbClr val="1F1F1F"/>
+                </a:solidFill>
+                <a:latin typeface="+mj-lt"/>
+              </a:rPr>
+              <a:t>velocidade</a:t>
+            </a:r>
+            <a:r>
+              <a:rPr sz="1200" b="0" i="0" dirty="0">
+                <a:solidFill>
+                  <a:srgbClr val="1F1F1F"/>
+                </a:solidFill>
+                <a:latin typeface="+mj-lt"/>
+              </a:rPr>
+              <a:t> do </a:t>
+            </a:r>
+            <a:r>
+              <a:rPr sz="1200" b="0" i="0" dirty="0" err="1">
+                <a:solidFill>
+                  <a:srgbClr val="1F1F1F"/>
+                </a:solidFill>
+                <a:latin typeface="+mj-lt"/>
+              </a:rPr>
+              <a:t>agente</a:t>
+            </a:r>
+            <a:r>
+              <a:rPr sz="1200" b="0" i="0" dirty="0">
+                <a:solidFill>
+                  <a:srgbClr val="1F1F1F"/>
+                </a:solidFill>
+                <a:latin typeface="+mj-lt"/>
+              </a:rPr>
+              <a:t> </a:t>
+            </a:r>
+            <a:r>
+              <a:rPr sz="1200" b="0" i="0" dirty="0" err="1">
+                <a:solidFill>
+                  <a:srgbClr val="1F1F1F"/>
+                </a:solidFill>
+                <a:latin typeface="+mj-lt"/>
+              </a:rPr>
+              <a:t>diminui</a:t>
+            </a:r>
+            <a:r>
+              <a:rPr sz="1200" b="0" i="0" dirty="0">
+                <a:solidFill>
+                  <a:srgbClr val="1F1F1F"/>
+                </a:solidFill>
+                <a:latin typeface="+mj-lt"/>
+              </a:rPr>
+              <a:t> com </a:t>
+            </a:r>
+            <a:r>
+              <a:rPr sz="1200" b="0" i="0" dirty="0" err="1">
+                <a:solidFill>
+                  <a:srgbClr val="1F1F1F"/>
+                </a:solidFill>
+                <a:latin typeface="+mj-lt"/>
+              </a:rPr>
+              <a:t>densidade</a:t>
+            </a:r>
+            <a:r>
+              <a:rPr sz="1200" b="0" i="0" dirty="0">
+                <a:solidFill>
+                  <a:srgbClr val="1F1F1F"/>
+                </a:solidFill>
+                <a:latin typeface="+mj-lt"/>
+              </a:rPr>
+              <a:t> e </a:t>
+            </a:r>
+            <a:r>
+              <a:rPr sz="1200" b="0" i="0" dirty="0" err="1">
+                <a:solidFill>
+                  <a:srgbClr val="1F1F1F"/>
+                </a:solidFill>
+                <a:latin typeface="+mj-lt"/>
+              </a:rPr>
+              <a:t>fumaça</a:t>
+            </a:r>
+            <a:r>
+              <a:rPr sz="1200" b="0" i="0" dirty="0">
+                <a:solidFill>
+                  <a:srgbClr val="1F1F1F"/>
+                </a:solidFill>
+                <a:latin typeface="+mj-lt"/>
+              </a:rPr>
+              <a:t>:</a:t>
+            </a:r>
+          </a:p>
+          <a:p>
+            <a:pPr algn="l">
+              <a:spcBef>
+                <a:spcPts val="200"/>
+              </a:spcBef>
+            </a:pPr>
+            <a:r>
+              <a:rPr sz="1300" b="0" i="1" dirty="0">
+                <a:solidFill>
+                  <a:srgbClr val="1F1F1F"/>
+                </a:solidFill>
+                <a:latin typeface="Cambria"/>
+              </a:rPr>
+              <a:t>         vᵢ(t) = f(</a:t>
+            </a:r>
+            <a:r>
+              <a:rPr sz="1300" b="0" i="1" dirty="0" err="1">
+                <a:solidFill>
+                  <a:srgbClr val="1F1F1F"/>
+                </a:solidFill>
+                <a:latin typeface="Cambria"/>
+              </a:rPr>
+              <a:t>v_max</a:t>
+            </a:r>
+            <a:r>
+              <a:rPr sz="1300" b="0" i="1" dirty="0">
+                <a:solidFill>
+                  <a:srgbClr val="1F1F1F"/>
+                </a:solidFill>
+                <a:latin typeface="Cambria"/>
+              </a:rPr>
+              <a:t>, ρ, Φ)</a:t>
+            </a:r>
+          </a:p>
+          <a:p>
+            <a:pPr algn="l">
+              <a:spcBef>
+                <a:spcPts val="1000"/>
+              </a:spcBef>
+            </a:pPr>
+            <a:r>
+              <a:rPr sz="1200" b="0" i="0" dirty="0">
+                <a:solidFill>
+                  <a:srgbClr val="1F1F1F"/>
+                </a:solidFill>
+                <a:latin typeface="+mj-lt"/>
+              </a:rPr>
+              <a:t>5. O </a:t>
+            </a:r>
+            <a:r>
+              <a:rPr sz="1200" b="0" i="0" dirty="0" err="1">
+                <a:solidFill>
+                  <a:srgbClr val="1F1F1F"/>
+                </a:solidFill>
+                <a:latin typeface="+mj-lt"/>
+              </a:rPr>
+              <a:t>agente</a:t>
+            </a:r>
+            <a:r>
+              <a:rPr sz="1200" b="0" i="0" dirty="0">
+                <a:solidFill>
+                  <a:srgbClr val="1F1F1F"/>
+                </a:solidFill>
+                <a:latin typeface="+mj-lt"/>
+              </a:rPr>
+              <a:t> </a:t>
+            </a:r>
+            <a:r>
+              <a:rPr sz="1200" b="0" i="0" dirty="0" err="1">
+                <a:solidFill>
+                  <a:srgbClr val="1F1F1F"/>
+                </a:solidFill>
+                <a:latin typeface="+mj-lt"/>
+              </a:rPr>
+              <a:t>evacua</a:t>
+            </a:r>
+            <a:r>
+              <a:rPr sz="1200" b="0" i="0" dirty="0">
+                <a:solidFill>
+                  <a:srgbClr val="1F1F1F"/>
+                </a:solidFill>
+                <a:latin typeface="+mj-lt"/>
+              </a:rPr>
+              <a:t> </a:t>
+            </a:r>
+            <a:r>
+              <a:rPr sz="1200" b="0" i="0" dirty="0" err="1">
+                <a:solidFill>
+                  <a:srgbClr val="1F1F1F"/>
+                </a:solidFill>
+                <a:latin typeface="+mj-lt"/>
+              </a:rPr>
+              <a:t>quando</a:t>
+            </a:r>
+            <a:r>
+              <a:rPr sz="1200" b="0" i="0" dirty="0">
+                <a:solidFill>
+                  <a:srgbClr val="1F1F1F"/>
+                </a:solidFill>
+                <a:latin typeface="+mj-lt"/>
+              </a:rPr>
+              <a:t> </a:t>
+            </a:r>
+            <a:r>
+              <a:rPr sz="1200" b="0" i="0" dirty="0" err="1">
+                <a:solidFill>
+                  <a:srgbClr val="1F1F1F"/>
+                </a:solidFill>
+                <a:latin typeface="+mj-lt"/>
+              </a:rPr>
+              <a:t>alcança</a:t>
+            </a:r>
+            <a:r>
+              <a:rPr sz="1200" b="0" i="0" dirty="0">
+                <a:solidFill>
+                  <a:srgbClr val="1F1F1F"/>
+                </a:solidFill>
+                <a:latin typeface="+mj-lt"/>
+              </a:rPr>
+              <a:t> </a:t>
+            </a:r>
+            <a:r>
+              <a:rPr sz="1200" b="0" i="0" dirty="0" err="1">
+                <a:solidFill>
+                  <a:srgbClr val="1F1F1F"/>
+                </a:solidFill>
+                <a:latin typeface="+mj-lt"/>
+              </a:rPr>
+              <a:t>uma</a:t>
+            </a:r>
+            <a:r>
+              <a:rPr sz="1200" b="0" i="0" dirty="0">
+                <a:solidFill>
+                  <a:srgbClr val="1F1F1F"/>
+                </a:solidFill>
+                <a:latin typeface="+mj-lt"/>
+              </a:rPr>
+              <a:t> </a:t>
+            </a:r>
+            <a:r>
+              <a:rPr sz="1200" b="0" i="0" dirty="0" err="1">
+                <a:solidFill>
+                  <a:srgbClr val="1F1F1F"/>
+                </a:solidFill>
+                <a:latin typeface="+mj-lt"/>
+              </a:rPr>
+              <a:t>saída</a:t>
+            </a:r>
+            <a:r>
+              <a:rPr sz="1200" b="0" i="0" dirty="0">
+                <a:solidFill>
+                  <a:srgbClr val="1F1F1F"/>
+                </a:solidFill>
+                <a:latin typeface="+mj-lt"/>
+              </a:rPr>
+              <a:t>:</a:t>
+            </a:r>
+          </a:p>
+          <a:p>
+            <a:pPr algn="l">
+              <a:spcBef>
+                <a:spcPts val="200"/>
+              </a:spcBef>
+            </a:pPr>
+            <a:r>
+              <a:rPr sz="1300" b="0" i="1" dirty="0">
+                <a:solidFill>
+                  <a:srgbClr val="1F1F1F"/>
+                </a:solidFill>
+                <a:latin typeface="Cambria"/>
+              </a:rPr>
+              <a:t>         xᵢ(t) ∈ Saídas  ⇒  evac(aᵢ) = 1</a:t>
+            </a:r>
+          </a:p>
+        </p:txBody>
+      </p:sp>
+    </p:spTree>
+    <p:extLst>
+      <p:ext uri="{BB962C8B-B14F-4D97-AF65-F5344CB8AC3E}">
+        <p14:creationId xmlns:p14="http://schemas.microsoft.com/office/powerpoint/2010/main" val="833166585"/>
+      </p:ext>
+    </p:extLst>
+  </p:cSld>
+  <p:clrMapOvr>
+    <a:masterClrMapping/>
+  </p:clrMapOvr>
+</p:sld>
+</file>
+
+<file path=ppt/slides/slide11.xml><?xml version="1.0" encoding="utf-8"?>
+<p:sld xmlns:a="http://schemas.openxmlformats.org/drawingml/2006/main" xmlns:r="http://schemas.openxmlformats.org/officeDocument/2006/relationships" xmlns:p="http://schemas.openxmlformats.org/presentationml/2006/main">
+  <p:cSld>
+    <p:spTree>
+      <p:nvGrpSpPr>
+        <p:cNvPr id="1" name="">
+          <a:extLst>
+            <a:ext uri="{FF2B5EF4-FFF2-40B4-BE49-F238E27FC236}">
+              <a16:creationId xmlns:a16="http://schemas.microsoft.com/office/drawing/2014/main" id="{0ACD7087-51D5-1E20-9136-BE1936B7CE04}"/>
+            </a:ext>
+          </a:extLst>
+        </p:cNvPr>
+        <p:cNvGrpSpPr/>
+        <p:nvPr/>
+      </p:nvGrpSpPr>
+      <p:grpSpPr>
+        <a:xfrm>
+          <a:off x="0" y="0"/>
+          <a:ext cx="0" cy="0"/>
+          <a:chOff x="0" y="0"/>
+          <a:chExt cx="0" cy="0"/>
+        </a:xfrm>
+      </p:grpSpPr>
+      <p:sp>
+        <p:nvSpPr>
+          <p:cNvPr id="2" name="TextBox 1">
+            <a:extLst>
+              <a:ext uri="{FF2B5EF4-FFF2-40B4-BE49-F238E27FC236}">
+                <a16:creationId xmlns:a16="http://schemas.microsoft.com/office/drawing/2014/main" id="{ACECC3B8-33C0-ED3B-B742-45F6D9979F9E}"/>
+              </a:ext>
+            </a:extLst>
+          </p:cNvPr>
+          <p:cNvSpPr txBox="1"/>
+          <p:nvPr/>
+        </p:nvSpPr>
+        <p:spPr>
+          <a:xfrm>
+            <a:off x="200990" y="540000"/>
+            <a:ext cx="11200000" cy="560000"/>
+          </a:xfrm>
+          <a:prstGeom prst="rect">
+            <a:avLst/>
+          </a:prstGeom>
+          <a:noFill/>
+        </p:spPr>
+        <p:txBody>
+          <a:bodyPr wrap="square" lIns="0" rIns="0">
+            <a:spAutoFit/>
+          </a:bodyPr>
+          <a:lstStyle/>
+          <a:p>
+            <a:pPr algn="l"/>
+            <a:r>
+              <a:rPr sz="2800" b="1" i="0" dirty="0">
+                <a:solidFill>
+                  <a:srgbClr val="156082"/>
+                </a:solidFill>
+                <a:latin typeface="Calibri"/>
+              </a:rPr>
+              <a:t>3.2 </a:t>
+            </a:r>
+            <a:r>
+              <a:rPr sz="2800" b="1" i="0" dirty="0" err="1">
+                <a:solidFill>
+                  <a:srgbClr val="156082"/>
+                </a:solidFill>
+                <a:latin typeface="Calibri"/>
+              </a:rPr>
+              <a:t>Variáveis</a:t>
+            </a:r>
+            <a:r>
+              <a:rPr sz="2800" b="1" i="0" dirty="0">
+                <a:solidFill>
+                  <a:srgbClr val="156082"/>
+                </a:solidFill>
+                <a:latin typeface="Calibri"/>
+              </a:rPr>
+              <a:t> </a:t>
+            </a:r>
+            <a:r>
+              <a:rPr sz="2800" b="1" i="0" dirty="0" err="1">
+                <a:solidFill>
+                  <a:srgbClr val="156082"/>
+                </a:solidFill>
+                <a:latin typeface="Calibri"/>
+              </a:rPr>
+              <a:t>Principais</a:t>
+            </a:r>
+            <a:endParaRPr sz="2800" b="1" i="0" dirty="0">
+              <a:solidFill>
+                <a:srgbClr val="156082"/>
+              </a:solidFill>
+              <a:latin typeface="Calibri"/>
+            </a:endParaRPr>
+          </a:p>
+        </p:txBody>
+      </p:sp>
+      <p:graphicFrame>
+        <p:nvGraphicFramePr>
+          <p:cNvPr id="3" name="Table 2">
+            <a:extLst>
+              <a:ext uri="{FF2B5EF4-FFF2-40B4-BE49-F238E27FC236}">
+                <a16:creationId xmlns:a16="http://schemas.microsoft.com/office/drawing/2014/main" id="{32394090-D35B-CB59-273A-70890A6D8B59}"/>
+              </a:ext>
+            </a:extLst>
+          </p:cNvPr>
+          <p:cNvGraphicFramePr>
+            <a:graphicFrameLocks noGrp="1"/>
+          </p:cNvGraphicFramePr>
+          <p:nvPr>
+            <p:extLst>
+              <p:ext uri="{D42A27DB-BD31-4B8C-83A1-F6EECF244321}">
+                <p14:modId xmlns:p14="http://schemas.microsoft.com/office/powerpoint/2010/main" val="1123466945"/>
+              </p:ext>
+            </p:extLst>
+          </p:nvPr>
+        </p:nvGraphicFramePr>
+        <p:xfrm>
+          <a:off x="2642304" y="1100000"/>
+          <a:ext cx="7200000" cy="5584000"/>
+        </p:xfrm>
+        <a:graphic>
+          <a:graphicData uri="http://schemas.openxmlformats.org/drawingml/2006/table">
+            <a:tbl>
+              <a:tblPr firstRow="1" bandRow="1">
+                <a:tableStyleId>{5C22544A-7EE6-4342-B048-85BDC9FD1C3A}</a:tableStyleId>
+              </a:tblPr>
+              <a:tblGrid>
+                <a:gridCol w="2200000">
+                  <a:extLst>
+                    <a:ext uri="{9D8B030D-6E8A-4147-A177-3AD203B41FA5}">
+                      <a16:colId xmlns:a16="http://schemas.microsoft.com/office/drawing/2014/main" val="20000"/>
+                    </a:ext>
+                  </a:extLst>
+                </a:gridCol>
+                <a:gridCol w="5000000">
+                  <a:extLst>
+                    <a:ext uri="{9D8B030D-6E8A-4147-A177-3AD203B41FA5}">
+                      <a16:colId xmlns:a16="http://schemas.microsoft.com/office/drawing/2014/main" val="20001"/>
+                    </a:ext>
+                  </a:extLst>
+                </a:gridCol>
+              </a:tblGrid>
+              <a:tr h="460000">
+                <a:tc>
+                  <a:txBody>
+                    <a:bodyPr/>
+                    <a:lstStyle/>
+                    <a:p>
+                      <a:pPr algn="ctr"/>
+                      <a:r>
+                        <a:rPr sz="1400" b="1">
+                          <a:solidFill>
+                            <a:srgbClr val="C0392B"/>
+                          </a:solidFill>
+                          <a:latin typeface="+mj-lt"/>
+                        </a:rPr>
+                        <a:t>Variável</a:t>
+                      </a:r>
+                    </a:p>
+                  </a:txBody>
+                  <a:tcPr anchor="ctr">
+                    <a:solidFill>
+                      <a:srgbClr val="EDF2F7"/>
+                    </a:solidFill>
+                  </a:tcPr>
+                </a:tc>
+                <a:tc>
+                  <a:txBody>
+                    <a:bodyPr/>
+                    <a:lstStyle/>
+                    <a:p>
+                      <a:pPr algn="ctr"/>
+                      <a:r>
+                        <a:rPr sz="1400" b="1" dirty="0" err="1">
+                          <a:solidFill>
+                            <a:srgbClr val="C0392B"/>
+                          </a:solidFill>
+                          <a:latin typeface="+mj-lt"/>
+                        </a:rPr>
+                        <a:t>Significado</a:t>
+                      </a:r>
+                      <a:endParaRPr sz="1400" b="1" dirty="0">
+                        <a:solidFill>
+                          <a:srgbClr val="C0392B"/>
+                        </a:solidFill>
+                        <a:latin typeface="+mj-lt"/>
+                      </a:endParaRPr>
+                    </a:p>
+                  </a:txBody>
+                  <a:tcPr anchor="ctr">
+                    <a:solidFill>
+                      <a:srgbClr val="EDF2F7"/>
+                    </a:solidFill>
+                  </a:tcPr>
+                </a:tc>
+                <a:extLst>
+                  <a:ext uri="{0D108BD9-81ED-4DB2-BD59-A6C34878D82A}">
+                    <a16:rowId xmlns:a16="http://schemas.microsoft.com/office/drawing/2014/main" val="10000"/>
+                  </a:ext>
+                </a:extLst>
+              </a:tr>
+              <a:tr h="366000">
+                <a:tc>
+                  <a:txBody>
+                    <a:bodyPr/>
+                    <a:lstStyle/>
+                    <a:p>
+                      <a:pPr algn="ctr"/>
+                      <a:r>
+                        <a:rPr sz="1300" b="1" dirty="0">
+                          <a:solidFill>
+                            <a:srgbClr val="0E2841"/>
+                          </a:solidFill>
+                          <a:latin typeface="Cambria"/>
+                        </a:rPr>
+                        <a:t>(N)</a:t>
+                      </a:r>
+                    </a:p>
+                  </a:txBody>
+                  <a:tcPr anchor="ctr">
+                    <a:solidFill>
+                      <a:srgbClr val="E8E8E8"/>
+                    </a:solidFill>
+                  </a:tcPr>
+                </a:tc>
+                <a:tc>
+                  <a:txBody>
+                    <a:bodyPr/>
+                    <a:lstStyle/>
+                    <a:p>
+                      <a:pPr algn="l"/>
+                      <a:r>
+                        <a:rPr sz="1200" b="0" dirty="0">
+                          <a:solidFill>
+                            <a:srgbClr val="1F1F1F"/>
+                          </a:solidFill>
+                          <a:latin typeface="+mj-lt"/>
+                        </a:rPr>
+                        <a:t>número total de ocupantes</a:t>
+                      </a:r>
+                    </a:p>
+                  </a:txBody>
+                  <a:tcPr anchor="ctr">
+                    <a:solidFill>
+                      <a:srgbClr val="E8E8E8"/>
+                    </a:solidFill>
+                  </a:tcPr>
+                </a:tc>
+                <a:extLst>
+                  <a:ext uri="{0D108BD9-81ED-4DB2-BD59-A6C34878D82A}">
+                    <a16:rowId xmlns:a16="http://schemas.microsoft.com/office/drawing/2014/main" val="10001"/>
+                  </a:ext>
+                </a:extLst>
+              </a:tr>
+              <a:tr h="366000">
+                <a:tc>
+                  <a:txBody>
+                    <a:bodyPr/>
+                    <a:lstStyle/>
+                    <a:p>
+                      <a:pPr algn="ctr"/>
+                      <a:r>
+                        <a:rPr sz="1300" b="1" dirty="0">
+                          <a:solidFill>
+                            <a:srgbClr val="0E2841"/>
+                          </a:solidFill>
+                          <a:latin typeface="Cambria"/>
+                        </a:rPr>
+                        <a:t>(aᵢ)</a:t>
+                      </a:r>
+                    </a:p>
+                  </a:txBody>
+                  <a:tcPr anchor="ctr">
+                    <a:solidFill>
+                      <a:srgbClr val="EDF2F7"/>
+                    </a:solidFill>
+                  </a:tcPr>
+                </a:tc>
+                <a:tc>
+                  <a:txBody>
+                    <a:bodyPr/>
+                    <a:lstStyle/>
+                    <a:p>
+                      <a:pPr algn="l"/>
+                      <a:r>
+                        <a:rPr sz="1200" b="0" dirty="0">
+                          <a:solidFill>
+                            <a:srgbClr val="1F1F1F"/>
+                          </a:solidFill>
+                          <a:latin typeface="+mj-lt"/>
+                        </a:rPr>
+                        <a:t>agente i, com i ∈ {1, ..., N}</a:t>
+                      </a:r>
+                    </a:p>
+                  </a:txBody>
+                  <a:tcPr anchor="ctr">
+                    <a:solidFill>
+                      <a:srgbClr val="EDF2F7"/>
+                    </a:solidFill>
+                  </a:tcPr>
+                </a:tc>
+                <a:extLst>
+                  <a:ext uri="{0D108BD9-81ED-4DB2-BD59-A6C34878D82A}">
+                    <a16:rowId xmlns:a16="http://schemas.microsoft.com/office/drawing/2014/main" val="10002"/>
+                  </a:ext>
+                </a:extLst>
+              </a:tr>
+              <a:tr h="366000">
+                <a:tc>
+                  <a:txBody>
+                    <a:bodyPr/>
+                    <a:lstStyle/>
+                    <a:p>
+                      <a:pPr algn="ctr"/>
+                      <a:r>
+                        <a:rPr sz="1300" b="1" dirty="0">
+                          <a:solidFill>
+                            <a:srgbClr val="0E2841"/>
+                          </a:solidFill>
+                          <a:latin typeface="Cambria"/>
+                        </a:rPr>
+                        <a:t>(tipo(aᵢ))</a:t>
+                      </a:r>
+                    </a:p>
+                  </a:txBody>
+                  <a:tcPr anchor="ctr">
+                    <a:solidFill>
+                      <a:srgbClr val="E8E8E8"/>
+                    </a:solidFill>
+                  </a:tcPr>
+                </a:tc>
+                <a:tc>
+                  <a:txBody>
+                    <a:bodyPr/>
+                    <a:lstStyle/>
+                    <a:p>
+                      <a:pPr algn="l"/>
+                      <a:r>
+                        <a:rPr sz="1200" b="0" dirty="0">
+                          <a:solidFill>
+                            <a:srgbClr val="1F1F1F"/>
+                          </a:solidFill>
+                          <a:latin typeface="+mj-lt"/>
+                        </a:rPr>
+                        <a:t>tipo do agente ∈ {adulto, idoso, PcD, brigadista}</a:t>
+                      </a:r>
+                    </a:p>
+                  </a:txBody>
+                  <a:tcPr anchor="ctr">
+                    <a:solidFill>
+                      <a:srgbClr val="E8E8E8"/>
+                    </a:solidFill>
+                  </a:tcPr>
+                </a:tc>
+                <a:extLst>
+                  <a:ext uri="{0D108BD9-81ED-4DB2-BD59-A6C34878D82A}">
+                    <a16:rowId xmlns:a16="http://schemas.microsoft.com/office/drawing/2014/main" val="10003"/>
+                  </a:ext>
+                </a:extLst>
+              </a:tr>
+              <a:tr h="366000">
+                <a:tc>
+                  <a:txBody>
+                    <a:bodyPr/>
+                    <a:lstStyle/>
+                    <a:p>
+                      <a:pPr algn="ctr"/>
+                      <a:r>
+                        <a:rPr sz="1300" b="1" dirty="0">
+                          <a:solidFill>
+                            <a:srgbClr val="0E2841"/>
+                          </a:solidFill>
+                          <a:latin typeface="Cambria"/>
+                        </a:rPr>
+                        <a:t>(xᵢ(t))</a:t>
+                      </a:r>
+                    </a:p>
+                  </a:txBody>
+                  <a:tcPr anchor="ctr">
+                    <a:solidFill>
+                      <a:srgbClr val="EDF2F7"/>
+                    </a:solidFill>
+                  </a:tcPr>
+                </a:tc>
+                <a:tc>
+                  <a:txBody>
+                    <a:bodyPr/>
+                    <a:lstStyle/>
+                    <a:p>
+                      <a:pPr algn="l"/>
+                      <a:r>
+                        <a:rPr sz="1200" b="0" dirty="0">
+                          <a:solidFill>
+                            <a:srgbClr val="1F1F1F"/>
+                          </a:solidFill>
+                          <a:latin typeface="+mj-lt"/>
+                        </a:rPr>
+                        <a:t>posição do agente no tempo t</a:t>
+                      </a:r>
+                    </a:p>
+                  </a:txBody>
+                  <a:tcPr anchor="ctr">
+                    <a:solidFill>
+                      <a:srgbClr val="EDF2F7"/>
+                    </a:solidFill>
+                  </a:tcPr>
+                </a:tc>
+                <a:extLst>
+                  <a:ext uri="{0D108BD9-81ED-4DB2-BD59-A6C34878D82A}">
+                    <a16:rowId xmlns:a16="http://schemas.microsoft.com/office/drawing/2014/main" val="10004"/>
+                  </a:ext>
+                </a:extLst>
+              </a:tr>
+              <a:tr h="366000">
+                <a:tc>
+                  <a:txBody>
+                    <a:bodyPr/>
+                    <a:lstStyle/>
+                    <a:p>
+                      <a:pPr algn="ctr"/>
+                      <a:r>
+                        <a:rPr sz="1300" b="1" dirty="0">
+                          <a:solidFill>
+                            <a:srgbClr val="0E2841"/>
+                          </a:solidFill>
+                          <a:latin typeface="Cambria"/>
+                        </a:rPr>
+                        <a:t>(vᵢ(t))</a:t>
+                      </a:r>
+                    </a:p>
+                  </a:txBody>
+                  <a:tcPr anchor="ctr">
+                    <a:solidFill>
+                      <a:srgbClr val="E8E8E8"/>
+                    </a:solidFill>
+                  </a:tcPr>
+                </a:tc>
+                <a:tc>
+                  <a:txBody>
+                    <a:bodyPr/>
+                    <a:lstStyle/>
+                    <a:p>
+                      <a:pPr algn="l"/>
+                      <a:r>
+                        <a:rPr sz="1200" b="0" dirty="0">
+                          <a:solidFill>
+                            <a:srgbClr val="1F1F1F"/>
+                          </a:solidFill>
+                          <a:latin typeface="+mj-lt"/>
+                        </a:rPr>
+                        <a:t>velocidade do agente no tempo t</a:t>
+                      </a:r>
+                    </a:p>
+                  </a:txBody>
+                  <a:tcPr anchor="ctr">
+                    <a:solidFill>
+                      <a:srgbClr val="E8E8E8"/>
+                    </a:solidFill>
+                  </a:tcPr>
+                </a:tc>
+                <a:extLst>
+                  <a:ext uri="{0D108BD9-81ED-4DB2-BD59-A6C34878D82A}">
+                    <a16:rowId xmlns:a16="http://schemas.microsoft.com/office/drawing/2014/main" val="10005"/>
+                  </a:ext>
+                </a:extLst>
+              </a:tr>
+              <a:tr h="366000">
+                <a:tc>
+                  <a:txBody>
+                    <a:bodyPr/>
+                    <a:lstStyle/>
+                    <a:p>
+                      <a:pPr algn="ctr"/>
+                      <a:r>
+                        <a:rPr sz="1300" b="1" dirty="0">
+                          <a:solidFill>
+                            <a:srgbClr val="0E2841"/>
+                          </a:solidFill>
+                          <a:latin typeface="Cambria"/>
+                        </a:rPr>
+                        <a:t>(v_max)</a:t>
+                      </a:r>
+                    </a:p>
+                  </a:txBody>
+                  <a:tcPr anchor="ctr">
+                    <a:solidFill>
+                      <a:srgbClr val="EDF2F7"/>
+                    </a:solidFill>
+                  </a:tcPr>
+                </a:tc>
+                <a:tc>
+                  <a:txBody>
+                    <a:bodyPr/>
+                    <a:lstStyle/>
+                    <a:p>
+                      <a:pPr algn="l"/>
+                      <a:r>
+                        <a:rPr sz="1200" b="0" dirty="0">
+                          <a:solidFill>
+                            <a:srgbClr val="1F1F1F"/>
+                          </a:solidFill>
+                          <a:latin typeface="+mj-lt"/>
+                        </a:rPr>
+                        <a:t>velocidade máxima por tipo (1.0 / 0.6 / 0.4 / 1.5)</a:t>
+                      </a:r>
+                    </a:p>
+                  </a:txBody>
+                  <a:tcPr anchor="ctr">
+                    <a:solidFill>
+                      <a:srgbClr val="EDF2F7"/>
+                    </a:solidFill>
+                  </a:tcPr>
+                </a:tc>
+                <a:extLst>
+                  <a:ext uri="{0D108BD9-81ED-4DB2-BD59-A6C34878D82A}">
+                    <a16:rowId xmlns:a16="http://schemas.microsoft.com/office/drawing/2014/main" val="10006"/>
+                  </a:ext>
+                </a:extLst>
+              </a:tr>
+              <a:tr h="366000">
+                <a:tc>
+                  <a:txBody>
+                    <a:bodyPr/>
+                    <a:lstStyle/>
+                    <a:p>
+                      <a:pPr algn="ctr"/>
+                      <a:r>
+                        <a:rPr sz="1300" b="1" dirty="0">
+                          <a:solidFill>
+                            <a:srgbClr val="0E2841"/>
+                          </a:solidFill>
+                          <a:latin typeface="Cambria"/>
+                        </a:rPr>
+                        <a:t>(ρ(x, t))</a:t>
+                      </a:r>
+                    </a:p>
+                  </a:txBody>
+                  <a:tcPr anchor="ctr">
+                    <a:solidFill>
+                      <a:srgbClr val="E8E8E8"/>
+                    </a:solidFill>
+                  </a:tcPr>
+                </a:tc>
+                <a:tc>
+                  <a:txBody>
+                    <a:bodyPr/>
+                    <a:lstStyle/>
+                    <a:p>
+                      <a:pPr algn="l"/>
+                      <a:r>
+                        <a:rPr sz="1200" b="0" dirty="0">
+                          <a:solidFill>
+                            <a:srgbClr val="1F1F1F"/>
+                          </a:solidFill>
+                          <a:latin typeface="+mj-lt"/>
+                        </a:rPr>
+                        <a:t>densidade local de agentes</a:t>
+                      </a:r>
+                    </a:p>
+                  </a:txBody>
+                  <a:tcPr anchor="ctr">
+                    <a:solidFill>
+                      <a:srgbClr val="E8E8E8"/>
+                    </a:solidFill>
+                  </a:tcPr>
+                </a:tc>
+                <a:extLst>
+                  <a:ext uri="{0D108BD9-81ED-4DB2-BD59-A6C34878D82A}">
+                    <a16:rowId xmlns:a16="http://schemas.microsoft.com/office/drawing/2014/main" val="10007"/>
+                  </a:ext>
+                </a:extLst>
+              </a:tr>
+              <a:tr h="366000">
+                <a:tc>
+                  <a:txBody>
+                    <a:bodyPr/>
+                    <a:lstStyle/>
+                    <a:p>
+                      <a:pPr algn="ctr"/>
+                      <a:r>
+                        <a:rPr sz="1300" b="1" dirty="0">
+                          <a:solidFill>
+                            <a:srgbClr val="0E2841"/>
+                          </a:solidFill>
+                          <a:latin typeface="Cambria"/>
+                        </a:rPr>
+                        <a:t>(Φ(x, t))</a:t>
+                      </a:r>
+                    </a:p>
+                  </a:txBody>
+                  <a:tcPr anchor="ctr">
+                    <a:solidFill>
+                      <a:srgbClr val="EDF2F7"/>
+                    </a:solidFill>
+                  </a:tcPr>
+                </a:tc>
+                <a:tc>
+                  <a:txBody>
+                    <a:bodyPr/>
+                    <a:lstStyle/>
+                    <a:p>
+                      <a:pPr algn="l"/>
+                      <a:r>
+                        <a:rPr sz="1200" b="0" dirty="0">
+                          <a:solidFill>
+                            <a:srgbClr val="1F1F1F"/>
+                          </a:solidFill>
+                          <a:latin typeface="+mj-lt"/>
+                        </a:rPr>
+                        <a:t>intensidade da fumaça</a:t>
+                      </a:r>
+                    </a:p>
+                  </a:txBody>
+                  <a:tcPr anchor="ctr">
+                    <a:solidFill>
+                      <a:srgbClr val="EDF2F7"/>
+                    </a:solidFill>
+                  </a:tcPr>
+                </a:tc>
+                <a:extLst>
+                  <a:ext uri="{0D108BD9-81ED-4DB2-BD59-A6C34878D82A}">
+                    <a16:rowId xmlns:a16="http://schemas.microsoft.com/office/drawing/2014/main" val="10008"/>
+                  </a:ext>
+                </a:extLst>
+              </a:tr>
+              <a:tr h="366000">
+                <a:tc>
+                  <a:txBody>
+                    <a:bodyPr/>
+                    <a:lstStyle/>
+                    <a:p>
+                      <a:pPr algn="ctr"/>
+                      <a:r>
+                        <a:rPr sz="1300" b="1" dirty="0">
+                          <a:solidFill>
+                            <a:srgbClr val="0E2841"/>
+                          </a:solidFill>
+                          <a:latin typeface="Cambria"/>
+                        </a:rPr>
+                        <a:t>(V(x, t))</a:t>
+                      </a:r>
+                    </a:p>
+                  </a:txBody>
+                  <a:tcPr anchor="ctr">
+                    <a:solidFill>
+                      <a:srgbClr val="E8E8E8"/>
+                    </a:solidFill>
+                  </a:tcPr>
+                </a:tc>
+                <a:tc>
+                  <a:txBody>
+                    <a:bodyPr/>
+                    <a:lstStyle/>
+                    <a:p>
+                      <a:pPr algn="l"/>
+                      <a:r>
+                        <a:rPr sz="1200" b="0" dirty="0">
+                          <a:solidFill>
+                            <a:srgbClr val="1F1F1F"/>
+                          </a:solidFill>
+                          <a:latin typeface="+mj-lt"/>
+                        </a:rPr>
+                        <a:t>visibilidade</a:t>
+                      </a:r>
+                    </a:p>
+                  </a:txBody>
+                  <a:tcPr anchor="ctr">
+                    <a:solidFill>
+                      <a:srgbClr val="E8E8E8"/>
+                    </a:solidFill>
+                  </a:tcPr>
+                </a:tc>
+                <a:extLst>
+                  <a:ext uri="{0D108BD9-81ED-4DB2-BD59-A6C34878D82A}">
+                    <a16:rowId xmlns:a16="http://schemas.microsoft.com/office/drawing/2014/main" val="10009"/>
+                  </a:ext>
+                </a:extLst>
+              </a:tr>
+              <a:tr h="366000">
+                <a:tc>
+                  <a:txBody>
+                    <a:bodyPr/>
+                    <a:lstStyle/>
+                    <a:p>
+                      <a:pPr algn="ctr"/>
+                      <a:r>
+                        <a:rPr sz="1300" b="1" dirty="0">
+                          <a:solidFill>
+                            <a:srgbClr val="0E2841"/>
+                          </a:solidFill>
+                          <a:latin typeface="Cambria"/>
+                        </a:rPr>
+                        <a:t>(Cₑ)</a:t>
+                      </a:r>
+                    </a:p>
+                  </a:txBody>
+                  <a:tcPr anchor="ctr">
+                    <a:solidFill>
+                      <a:srgbClr val="EDF2F7"/>
+                    </a:solidFill>
+                  </a:tcPr>
+                </a:tc>
+                <a:tc>
+                  <a:txBody>
+                    <a:bodyPr/>
+                    <a:lstStyle/>
+                    <a:p>
+                      <a:pPr algn="l"/>
+                      <a:r>
+                        <a:rPr sz="1200" b="0" dirty="0">
+                          <a:solidFill>
+                            <a:srgbClr val="1F1F1F"/>
+                          </a:solidFill>
+                          <a:latin typeface="+mj-lt"/>
+                        </a:rPr>
+                        <a:t>capacidade de fluxo da escada</a:t>
+                      </a:r>
+                    </a:p>
+                  </a:txBody>
+                  <a:tcPr anchor="ctr">
+                    <a:solidFill>
+                      <a:srgbClr val="EDF2F7"/>
+                    </a:solidFill>
+                  </a:tcPr>
+                </a:tc>
+                <a:extLst>
+                  <a:ext uri="{0D108BD9-81ED-4DB2-BD59-A6C34878D82A}">
+                    <a16:rowId xmlns:a16="http://schemas.microsoft.com/office/drawing/2014/main" val="10010"/>
+                  </a:ext>
+                </a:extLst>
+              </a:tr>
+              <a:tr h="366000">
+                <a:tc>
+                  <a:txBody>
+                    <a:bodyPr/>
+                    <a:lstStyle/>
+                    <a:p>
+                      <a:pPr algn="ctr"/>
+                      <a:r>
+                        <a:rPr sz="1300" b="1" dirty="0">
+                          <a:solidFill>
+                            <a:srgbClr val="0E2841"/>
+                          </a:solidFill>
+                          <a:latin typeface="Cambria"/>
+                        </a:rPr>
+                        <a:t>(estado(aᵢ,t))</a:t>
+                      </a:r>
+                    </a:p>
+                  </a:txBody>
+                  <a:tcPr anchor="ctr">
+                    <a:solidFill>
+                      <a:srgbClr val="E8E8E8"/>
+                    </a:solidFill>
+                  </a:tcPr>
+                </a:tc>
+                <a:tc>
+                  <a:txBody>
+                    <a:bodyPr/>
+                    <a:lstStyle/>
+                    <a:p>
+                      <a:pPr algn="l"/>
+                      <a:r>
+                        <a:rPr sz="1200" b="0" dirty="0">
+                          <a:solidFill>
+                            <a:srgbClr val="1F1F1F"/>
+                          </a:solidFill>
+                          <a:latin typeface="+mj-lt"/>
+                        </a:rPr>
+                        <a:t>estado ∈ {ativo, evacuado, ferido, morto}</a:t>
+                      </a:r>
+                    </a:p>
+                  </a:txBody>
+                  <a:tcPr anchor="ctr">
+                    <a:solidFill>
+                      <a:srgbClr val="E8E8E8"/>
+                    </a:solidFill>
+                  </a:tcPr>
+                </a:tc>
+                <a:extLst>
+                  <a:ext uri="{0D108BD9-81ED-4DB2-BD59-A6C34878D82A}">
+                    <a16:rowId xmlns:a16="http://schemas.microsoft.com/office/drawing/2014/main" val="10011"/>
+                  </a:ext>
+                </a:extLst>
+              </a:tr>
+              <a:tr h="366000">
+                <a:tc>
+                  <a:txBody>
+                    <a:bodyPr/>
+                    <a:lstStyle/>
+                    <a:p>
+                      <a:pPr algn="ctr"/>
+                      <a:r>
+                        <a:rPr sz="1300" b="1" dirty="0">
+                          <a:solidFill>
+                            <a:srgbClr val="0E2841"/>
+                          </a:solidFill>
+                          <a:latin typeface="Cambria"/>
+                        </a:rPr>
+                        <a:t>(pânico(aᵢ,t))</a:t>
+                      </a:r>
+                    </a:p>
+                  </a:txBody>
+                  <a:tcPr anchor="ctr">
+                    <a:solidFill>
+                      <a:srgbClr val="EDF2F7"/>
+                    </a:solidFill>
+                  </a:tcPr>
+                </a:tc>
+                <a:tc>
+                  <a:txBody>
+                    <a:bodyPr/>
+                    <a:lstStyle/>
+                    <a:p>
+                      <a:pPr algn="l"/>
+                      <a:r>
+                        <a:rPr sz="1200" b="0" dirty="0">
+                          <a:solidFill>
+                            <a:srgbClr val="1F1F1F"/>
+                          </a:solidFill>
+                          <a:latin typeface="+mj-lt"/>
+                        </a:rPr>
+                        <a:t>nível de pânico ∈ [0, 1]</a:t>
+                      </a:r>
+                    </a:p>
+                  </a:txBody>
+                  <a:tcPr anchor="ctr">
+                    <a:solidFill>
+                      <a:srgbClr val="EDF2F7"/>
+                    </a:solidFill>
+                  </a:tcPr>
+                </a:tc>
+                <a:extLst>
+                  <a:ext uri="{0D108BD9-81ED-4DB2-BD59-A6C34878D82A}">
+                    <a16:rowId xmlns:a16="http://schemas.microsoft.com/office/drawing/2014/main" val="10012"/>
+                  </a:ext>
+                </a:extLst>
+              </a:tr>
+              <a:tr h="366000">
+                <a:tc>
+                  <a:txBody>
+                    <a:bodyPr/>
+                    <a:lstStyle/>
+                    <a:p>
+                      <a:pPr algn="ctr"/>
+                      <a:r>
+                        <a:rPr sz="1300" b="1" dirty="0">
+                          <a:solidFill>
+                            <a:srgbClr val="0E2841"/>
+                          </a:solidFill>
+                          <a:latin typeface="Cambria"/>
+                        </a:rPr>
+                        <a:t>(T_react,i)</a:t>
+                      </a:r>
+                    </a:p>
+                  </a:txBody>
+                  <a:tcPr anchor="ctr">
+                    <a:solidFill>
+                      <a:srgbClr val="E8E8E8"/>
+                    </a:solidFill>
+                  </a:tcPr>
+                </a:tc>
+                <a:tc>
+                  <a:txBody>
+                    <a:bodyPr/>
+                    <a:lstStyle/>
+                    <a:p>
+                      <a:pPr algn="l"/>
+                      <a:r>
+                        <a:rPr sz="1200" b="0" dirty="0">
+                          <a:solidFill>
+                            <a:srgbClr val="1F1F1F"/>
+                          </a:solidFill>
+                          <a:latin typeface="+mj-lt"/>
+                        </a:rPr>
+                        <a:t>tempo de reação do agente</a:t>
+                      </a:r>
+                    </a:p>
+                  </a:txBody>
+                  <a:tcPr anchor="ctr">
+                    <a:solidFill>
+                      <a:srgbClr val="E8E8E8"/>
+                    </a:solidFill>
+                  </a:tcPr>
+                </a:tc>
+                <a:extLst>
+                  <a:ext uri="{0D108BD9-81ED-4DB2-BD59-A6C34878D82A}">
+                    <a16:rowId xmlns:a16="http://schemas.microsoft.com/office/drawing/2014/main" val="10013"/>
+                  </a:ext>
+                </a:extLst>
+              </a:tr>
+              <a:tr h="366000">
+                <a:tc>
+                  <a:txBody>
+                    <a:bodyPr/>
+                    <a:lstStyle/>
+                    <a:p>
+                      <a:pPr algn="ctr"/>
+                      <a:r>
+                        <a:rPr sz="1300" b="1" dirty="0">
+                          <a:solidFill>
+                            <a:srgbClr val="0E2841"/>
+                          </a:solidFill>
+                          <a:latin typeface="Cambria"/>
+                        </a:rPr>
+                        <a:t>(T_evac)</a:t>
+                      </a:r>
+                    </a:p>
+                  </a:txBody>
+                  <a:tcPr anchor="ctr">
+                    <a:solidFill>
+                      <a:srgbClr val="EDF2F7"/>
+                    </a:solidFill>
+                  </a:tcPr>
+                </a:tc>
+                <a:tc>
+                  <a:txBody>
+                    <a:bodyPr/>
+                    <a:lstStyle/>
+                    <a:p>
+                      <a:pPr algn="l"/>
+                      <a:r>
+                        <a:rPr sz="1200" b="0" dirty="0">
+                          <a:solidFill>
+                            <a:srgbClr val="1F1F1F"/>
+                          </a:solidFill>
+                          <a:latin typeface="+mj-lt"/>
+                        </a:rPr>
+                        <a:t>tempo total de evacuação</a:t>
+                      </a:r>
+                    </a:p>
+                  </a:txBody>
+                  <a:tcPr anchor="ctr">
+                    <a:solidFill>
+                      <a:srgbClr val="EDF2F7"/>
+                    </a:solidFill>
+                  </a:tcPr>
+                </a:tc>
+                <a:extLst>
+                  <a:ext uri="{0D108BD9-81ED-4DB2-BD59-A6C34878D82A}">
+                    <a16:rowId xmlns:a16="http://schemas.microsoft.com/office/drawing/2014/main" val="10014"/>
+                  </a:ext>
+                </a:extLst>
+              </a:tr>
+            </a:tbl>
+          </a:graphicData>
+        </a:graphic>
+      </p:graphicFrame>
+    </p:spTree>
+    <p:extLst>
+      <p:ext uri="{BB962C8B-B14F-4D97-AF65-F5344CB8AC3E}">
+        <p14:creationId xmlns:p14="http://schemas.microsoft.com/office/powerpoint/2010/main" val="3108065800"/>
+      </p:ext>
+    </p:extLst>
+  </p:cSld>
+  <p:clrMapOvr>
+    <a:masterClrMapping/>
+  </p:clrMapOvr>
+</p:sld>
+</file>
+
+<file path=ppt/slides/slide12.xml><?xml version="1.0" encoding="utf-8"?>
+<p:sld xmlns:a="http://schemas.openxmlformats.org/drawingml/2006/main" xmlns:r="http://schemas.openxmlformats.org/officeDocument/2006/relationships" xmlns:p="http://schemas.openxmlformats.org/presentationml/2006/main">
+  <p:cSld>
+    <p:spTree>
+      <p:nvGrpSpPr>
+        <p:cNvPr id="1" name="">
+          <a:extLst>
+            <a:ext uri="{FF2B5EF4-FFF2-40B4-BE49-F238E27FC236}">
               <a16:creationId xmlns:a16="http://schemas.microsoft.com/office/drawing/2014/main" id="{310A6C9F-62B3-9027-CE87-419B0ACD69F4}"/>
             </a:ext>
           </a:extLst>
@@ -1430,7 +3895,7 @@
 </p:sld>
 </file>
 
-<file path=ppt/slides/slide11.xml><?xml version="1.0" encoding="utf-8"?>
+<file path=ppt/slides/slide13.xml><?xml version="1.0" encoding="utf-8"?>
 <p:sld xmlns:a="http://schemas.openxmlformats.org/drawingml/2006/main" xmlns:r="http://schemas.openxmlformats.org/officeDocument/2006/relationships" xmlns:p="http://schemas.openxmlformats.org/presentationml/2006/main">
   <p:cSld>
     <p:spTree>
@@ -1509,7 +3974,7 @@
 </p:sld>
 </file>
 
-<file path=ppt/slides/slide12.xml><?xml version="1.0" encoding="utf-8"?>
+<file path=ppt/slides/slide14.xml><?xml version="1.0" encoding="utf-8"?>
 <p:sld xmlns:a="http://schemas.openxmlformats.org/drawingml/2006/main" xmlns:r="http://schemas.openxmlformats.org/officeDocument/2006/relationships" xmlns:p="http://schemas.openxmlformats.org/presentationml/2006/main">
   <p:cSld>
     <p:spTree>
@@ -1588,7 +4053,7 @@
 </p:sld>
 </file>
 
-<file path=ppt/slides/slide13.xml><?xml version="1.0" encoding="utf-8"?>
+<file path=ppt/slides/slide15.xml><?xml version="1.0" encoding="utf-8"?>
 <p:sld xmlns:a="http://schemas.openxmlformats.org/drawingml/2006/main" xmlns:r="http://schemas.openxmlformats.org/officeDocument/2006/relationships" xmlns:p="http://schemas.openxmlformats.org/presentationml/2006/main">
   <p:cSld>
     <p:spTree>
